--- a/downloads/DCT_V1_Ch07_Slides.pptx
+++ b/downloads/DCT_V1_Ch07_Slides.pptx
@@ -129,7 +129,7 @@
   <p:extLst>
     <p:ext uri="{521415D9-36F7-43E2-AB2F-B90AF26B5E84}">
       <p14:sectionLst xmlns:p14="http://schemas.microsoft.com/office/powerpoint/2010/main">
-        <p14:section name="Opening" id="{17f60180-589f-6ee7-ed7e-375b5416e044}">
+        <p14:section name="Opening" id="{e8683250-2d23-c688-724f-c58a18ab9c71}">
           <p14:sldIdLst>
             <p14:sldId id="256"/>
             <p14:sldId id="257"/>
@@ -137,45 +137,45 @@
             <p14:sldId id="259"/>
           </p14:sldIdLst>
         </p14:section>
-        <p14:section name="7.1 From Acts to Behavior" id="{b57d38c6-38ca-8eb1-c37e-8747d615c8f3}">
+        <p14:section name="7.1 From Acts to Behavior" id="{fd7a65dd-4784-ed35-4a47-ef7665230a0d}">
           <p14:sldIdLst>
             <p14:sldId id="260"/>
           </p14:sldIdLst>
         </p14:section>
-        <p14:section name="7.2 Dynamic Enterprise Systems and Their Equations" id="{f536e6cd-5bf6-814b-5419-5cf478600684}">
+        <p14:section name="7.2 Dynamic Enterprise Systems and Their Equations" id="{980e7f86-699d-3a1d-72d0-ee30367fc330}">
           <p14:sldIdLst>
             <p14:sldId id="261"/>
             <p14:sldId id="262"/>
           </p14:sldIdLst>
         </p14:section>
-        <p14:section name="7.3 Continuous and Discrete Time" id="{803c6d22-9ba6-7f5f-dad9-b4bbadcd5279}">
+        <p14:section name="7.3 Continuous and Discrete Time" id="{3590dc92-6772-2703-4617-491e692336b6}">
           <p14:sldIdLst>
             <p14:sldId id="263"/>
           </p14:sldIdLst>
         </p14:section>
-        <p14:section name="7.4 The State Transition Structure" id="{af5f9c66-ca16-6f41-8779-f57e915b46bb}">
+        <p14:section name="7.4 The State Transition Structure" id="{0234b4ab-d809-cfef-e021-09b8bf189579}">
           <p14:sldIdLst>
             <p14:sldId id="264"/>
             <p14:sldId id="265"/>
           </p14:sldIdLst>
         </p14:section>
-        <p14:section name="7.5 Enterprise Equilibria" id="{99c3d43d-6bd3-cb11-cba9-85cb20e662ff}">
+        <p14:section name="7.5 Enterprise Equilibria" id="{69e51ba0-e569-d068-3251-6b17ec88b453}">
           <p14:sldIdLst>
             <p14:sldId id="266"/>
           </p14:sldIdLst>
         </p14:section>
-        <p14:section name="7.6 Enterprise Stability" id="{511e280c-5d53-e4c7-3bbc-2d7f032edfd3}">
+        <p14:section name="7.6 Enterprise Stability" id="{5b065664-3aef-0204-f862-f6038b77a8f2}">
           <p14:sldIdLst>
             <p14:sldId id="267"/>
             <p14:sldId id="268"/>
           </p14:sldIdLst>
         </p14:section>
-        <p14:section name="7.7 Feedback in Enterprise Dynamics" id="{1d907809-7242-0ae3-f8a0-0f1e6ca0768e}">
+        <p14:section name="7.7 Feedback in Enterprise Dynamics" id="{65d030fc-f1b4-ba11-6829-6af5f928cb9d}">
           <p14:sldIdLst>
             <p14:sldId id="269"/>
           </p14:sldIdLst>
         </p14:section>
-        <p14:section name="Worked Example 7.1" id="{608a41f6-d0e9-ef28-3cb7-d8cbc4625467}">
+        <p14:section name="Worked Example 7.1" id="{75b0f203-42ac-4432-43ad-9117e953a736}">
           <p14:sldIdLst>
             <p14:sldId id="270"/>
             <p14:sldId id="271"/>
@@ -184,12 +184,12 @@
             <p14:sldId id="274"/>
           </p14:sldIdLst>
         </p14:section>
-        <p14:section name="AXIOM Lab 1.7" id="{2f6a695c-51a0-cc64-f1ac-244f9a60e418}">
+        <p14:section name="AXIOM Lab 1.7" id="{c5c2c88b-8e12-6dad-1cf2-1317e917ce66}">
           <p14:sldIdLst>
             <p14:sldId id="275"/>
           </p14:sldIdLst>
         </p14:section>
-        <p14:section name="Close" id="{9e551884-33f8-4e8d-64af-da643ea994c7}">
+        <p14:section name="Close" id="{3a7beab6-bae6-9222-3ee4-79fac25401aa}">
           <p14:sldIdLst>
             <p14:sldId id="276"/>
             <p14:sldId id="277"/>

--- a/downloads/DCT_V1_Ch07_Slides.pptx
+++ b/downloads/DCT_V1_Ch07_Slides.pptx
@@ -129,7 +129,7 @@
   <p:extLst>
     <p:ext uri="{521415D9-36F7-43E2-AB2F-B90AF26B5E84}">
       <p14:sectionLst xmlns:p14="http://schemas.microsoft.com/office/powerpoint/2010/main">
-        <p14:section name="Opening" id="{e8683250-2d23-c688-724f-c58a18ab9c71}">
+        <p14:section name="Opening" id="{ad3bbbca-a120-92e7-47cc-e01a47e15cc2}">
           <p14:sldIdLst>
             <p14:sldId id="256"/>
             <p14:sldId id="257"/>
@@ -137,45 +137,45 @@
             <p14:sldId id="259"/>
           </p14:sldIdLst>
         </p14:section>
-        <p14:section name="7.1 From Acts to Behavior" id="{fd7a65dd-4784-ed35-4a47-ef7665230a0d}">
+        <p14:section name="7.1 From Acts to Behavior" id="{cca507e2-cca3-9c2a-cce2-bad3bc8cc572}">
           <p14:sldIdLst>
             <p14:sldId id="260"/>
           </p14:sldIdLst>
         </p14:section>
-        <p14:section name="7.2 Dynamic Enterprise Systems and Their Equations" id="{980e7f86-699d-3a1d-72d0-ee30367fc330}">
+        <p14:section name="7.2 Dynamic Enterprise Systems and Their Equations" id="{145b5fb8-2d06-e8d6-7739-b925ad7bc9d8}">
           <p14:sldIdLst>
             <p14:sldId id="261"/>
             <p14:sldId id="262"/>
           </p14:sldIdLst>
         </p14:section>
-        <p14:section name="7.3 Continuous and Discrete Time" id="{3590dc92-6772-2703-4617-491e692336b6}">
+        <p14:section name="7.3 Continuous and Discrete Time" id="{7eda9d71-903b-9a4b-a88f-5380e210486d}">
           <p14:sldIdLst>
             <p14:sldId id="263"/>
           </p14:sldIdLst>
         </p14:section>
-        <p14:section name="7.4 The State Transition Structure" id="{0234b4ab-d809-cfef-e021-09b8bf189579}">
+        <p14:section name="7.4 The State Transition Structure" id="{cd3019ab-948d-3685-8c73-5e4d0e77005e}">
           <p14:sldIdLst>
             <p14:sldId id="264"/>
             <p14:sldId id="265"/>
           </p14:sldIdLst>
         </p14:section>
-        <p14:section name="7.5 Enterprise Equilibria" id="{69e51ba0-e569-d068-3251-6b17ec88b453}">
+        <p14:section name="7.5 Enterprise Equilibria" id="{21665540-f0f2-24b9-5cb0-4703297a1807}">
           <p14:sldIdLst>
             <p14:sldId id="266"/>
           </p14:sldIdLst>
         </p14:section>
-        <p14:section name="7.6 Enterprise Stability" id="{5b065664-3aef-0204-f862-f6038b77a8f2}">
+        <p14:section name="7.6 Enterprise Stability" id="{dc05523d-0894-eff1-3f70-6f703fa504da}">
           <p14:sldIdLst>
             <p14:sldId id="267"/>
             <p14:sldId id="268"/>
           </p14:sldIdLst>
         </p14:section>
-        <p14:section name="7.7 Feedback in Enterprise Dynamics" id="{65d030fc-f1b4-ba11-6829-6af5f928cb9d}">
+        <p14:section name="7.7 Feedback in Enterprise Dynamics" id="{7c216cc9-a392-af86-fcc3-189868e42bd3}">
           <p14:sldIdLst>
             <p14:sldId id="269"/>
           </p14:sldIdLst>
         </p14:section>
-        <p14:section name="Worked Example 7.1" id="{75b0f203-42ac-4432-43ad-9117e953a736}">
+        <p14:section name="Worked Example 7.1" id="{3cf9d603-d318-8213-d9f7-5ca22e315747}">
           <p14:sldIdLst>
             <p14:sldId id="270"/>
             <p14:sldId id="271"/>
@@ -184,12 +184,12 @@
             <p14:sldId id="274"/>
           </p14:sldIdLst>
         </p14:section>
-        <p14:section name="AXIOM Lab 1.7" id="{c5c2c88b-8e12-6dad-1cf2-1317e917ce66}">
+        <p14:section name="AXIOM Lab 1.7" id="{546f2809-a6ea-9d6f-c376-e84f2c20fd36}">
           <p14:sldIdLst>
             <p14:sldId id="275"/>
           </p14:sldIdLst>
         </p14:section>
-        <p14:section name="Close" id="{3a7beab6-bae6-9222-3ee4-79fac25401aa}">
+        <p14:section name="Close" id="{130ec34d-c66b-3bd7-caac-ead9e2a5537a}">
           <p14:sldIdLst>
             <p14:sldId id="276"/>
             <p14:sldId id="277"/>
